--- a/session3/exam-strategy/q2/q2_exam_strategy.pptx
+++ b/session3/exam-strategy/q2/q2_exam_strategy.pptx
@@ -3188,8 +3188,8 @@
         </p:nvSpPr>
         <p:spPr>
           <a:xfrm>
-            <a:off x="274320" y="685800"/>
-            <a:ext cx="6400800" cy="1645920"/>
+            <a:off x="274320" y="640080"/>
+            <a:ext cx="6583680" cy="1280160"/>
           </a:xfrm>
           <a:prstGeom prst="rect">
             <a:avLst/>
@@ -3197,13 +3197,13 @@
           <a:noFill/>
         </p:spPr>
         <p:txBody>
-          <a:bodyPr wrap="square">
+          <a:bodyPr wrap="square" tIns="0" bIns="0">
             <a:spAutoFit/>
           </a:bodyPr>
           <a:lstStyle/>
           <a:p>
             <a:pPr>
-              <a:defRPr sz="1100">
+              <a:defRPr sz="900">
                 <a:solidFill>
                   <a:srgbClr val="FFFFFF"/>
                 </a:solidFill>
@@ -3224,8 +3224,8 @@
         </p:nvSpPr>
         <p:spPr>
           <a:xfrm>
-            <a:off x="365760" y="2377440"/>
-            <a:ext cx="274320" cy="274320"/>
+            <a:off x="274320" y="2057400"/>
+            <a:ext cx="201168" cy="201168"/>
           </a:xfrm>
           <a:prstGeom prst="ellipse">
             <a:avLst/>
@@ -3256,7 +3256,7 @@
           <a:lstStyle/>
           <a:p>
             <a:pPr algn="ctr">
-              <a:defRPr sz="900" b="1">
+              <a:defRPr sz="700" b="1">
                 <a:solidFill>
                   <a:srgbClr val="FFFFFF"/>
                 </a:solidFill>
@@ -3276,8 +3276,8 @@
         </p:nvSpPr>
         <p:spPr>
           <a:xfrm>
-            <a:off x="777240" y="2377440"/>
-            <a:ext cx="5943600" cy="411480"/>
+            <a:off x="548640" y="2011680"/>
+            <a:ext cx="6400800" cy="585215"/>
           </a:xfrm>
           <a:prstGeom prst="rect">
             <a:avLst/>
@@ -3285,13 +3285,13 @@
           <a:noFill/>
         </p:spPr>
         <p:txBody>
-          <a:bodyPr wrap="square">
+          <a:bodyPr wrap="square" tIns="25400" bIns="0" lIns="0">
             <a:spAutoFit/>
           </a:bodyPr>
           <a:lstStyle/>
           <a:p>
             <a:pPr>
-              <a:defRPr sz="1000">
+              <a:defRPr sz="800">
                 <a:solidFill>
                   <a:srgbClr val="CCCCCC"/>
                 </a:solidFill>
@@ -3299,7 +3299,7 @@
               </a:defRPr>
             </a:pPr>
             <a:r>
-              <a:t>When you configure the DynamoDB Encryption Client to use AWS KMS, the DynamoDB Encryption Client uses a KMS key that is </a:t>
+              <a:t>When you configure the DynamoDB Encryption Client to use AWS KMS, the DynamoDB Encryption Client use</a:t>
             </a:r>
           </a:p>
         </p:txBody>
@@ -3312,8 +3312,8 @@
         </p:nvSpPr>
         <p:spPr>
           <a:xfrm>
-            <a:off x="365760" y="2834640"/>
-            <a:ext cx="274320" cy="274320"/>
+            <a:off x="274320" y="2660904"/>
+            <a:ext cx="201168" cy="201168"/>
           </a:xfrm>
           <a:prstGeom prst="ellipse">
             <a:avLst/>
@@ -3344,7 +3344,7 @@
           <a:lstStyle/>
           <a:p>
             <a:pPr algn="ctr">
-              <a:defRPr sz="900" b="1">
+              <a:defRPr sz="700" b="1">
                 <a:solidFill>
                   <a:srgbClr val="FFFFFF"/>
                 </a:solidFill>
@@ -3364,8 +3364,8 @@
         </p:nvSpPr>
         <p:spPr>
           <a:xfrm>
-            <a:off x="777240" y="2834640"/>
-            <a:ext cx="5943600" cy="411480"/>
+            <a:off x="548640" y="2615184"/>
+            <a:ext cx="6400800" cy="585215"/>
           </a:xfrm>
           <a:prstGeom prst="rect">
             <a:avLst/>
@@ -3373,13 +3373,13 @@
           <a:noFill/>
         </p:spPr>
         <p:txBody>
-          <a:bodyPr wrap="square">
+          <a:bodyPr wrap="square" tIns="25400" bIns="0" lIns="0">
             <a:spAutoFit/>
           </a:bodyPr>
           <a:lstStyle/>
           <a:p>
             <a:pPr>
-              <a:defRPr sz="1000">
+              <a:defRPr sz="800">
                 <a:solidFill>
                   <a:srgbClr val="CCCCCC"/>
                 </a:solidFill>
@@ -3387,7 +3387,7 @@
               </a:defRPr>
             </a:pPr>
             <a:r>
-              <a:t>When you configure the DynamoDB Encryption Client to use AWS KMS, the DynamoDB Encryption Client uses a KMS key that is </a:t>
+              <a:t>When you configure the DynamoDB Encryption Client to use AWS KMS, the DynamoDB Encryption Client use</a:t>
             </a:r>
           </a:p>
         </p:txBody>
@@ -3400,8 +3400,8 @@
         </p:nvSpPr>
         <p:spPr>
           <a:xfrm>
-            <a:off x="365760" y="3291840"/>
-            <a:ext cx="274320" cy="274320"/>
+            <a:off x="274320" y="3264408"/>
+            <a:ext cx="201168" cy="201168"/>
           </a:xfrm>
           <a:prstGeom prst="ellipse">
             <a:avLst/>
@@ -3432,7 +3432,7 @@
           <a:lstStyle/>
           <a:p>
             <a:pPr algn="ctr">
-              <a:defRPr sz="900" b="1">
+              <a:defRPr sz="700" b="1">
                 <a:solidFill>
                   <a:srgbClr val="FFFFFF"/>
                 </a:solidFill>
@@ -3452,8 +3452,8 @@
         </p:nvSpPr>
         <p:spPr>
           <a:xfrm>
-            <a:off x="777240" y="3291840"/>
-            <a:ext cx="5943600" cy="411480"/>
+            <a:off x="548640" y="3218688"/>
+            <a:ext cx="6400800" cy="585215"/>
           </a:xfrm>
           <a:prstGeom prst="rect">
             <a:avLst/>
@@ -3461,13 +3461,13 @@
           <a:noFill/>
         </p:spPr>
         <p:txBody>
-          <a:bodyPr wrap="square">
+          <a:bodyPr wrap="square" tIns="25400" bIns="0" lIns="0">
             <a:spAutoFit/>
           </a:bodyPr>
           <a:lstStyle/>
           <a:p>
             <a:pPr>
-              <a:defRPr sz="1000">
+              <a:defRPr sz="800">
                 <a:solidFill>
                   <a:srgbClr val="CCCCCC"/>
                 </a:solidFill>
@@ -3475,7 +3475,7 @@
               </a:defRPr>
             </a:pPr>
             <a:r>
-              <a:t>The DynamoDB Encryption Client provides end-to-end protection for your data in transit and at rest. You can encrypt sele</a:t>
+              <a:t>The DynamoDB Encryption Client provides end-to-end protection for your data in transit and at rest. </a:t>
             </a:r>
           </a:p>
         </p:txBody>
@@ -3488,8 +3488,8 @@
         </p:nvSpPr>
         <p:spPr>
           <a:xfrm>
-            <a:off x="365760" y="3749039"/>
-            <a:ext cx="274320" cy="274320"/>
+            <a:off x="274320" y="3867911"/>
+            <a:ext cx="201168" cy="201168"/>
           </a:xfrm>
           <a:prstGeom prst="ellipse">
             <a:avLst/>
@@ -3520,7 +3520,7 @@
           <a:lstStyle/>
           <a:p>
             <a:pPr algn="ctr">
-              <a:defRPr sz="900" b="1">
+              <a:defRPr sz="700" b="1">
                 <a:solidFill>
                   <a:srgbClr val="FFFFFF"/>
                 </a:solidFill>
@@ -3540,8 +3540,8 @@
         </p:nvSpPr>
         <p:spPr>
           <a:xfrm>
-            <a:off x="777240" y="3749039"/>
-            <a:ext cx="5943600" cy="411480"/>
+            <a:off x="548640" y="3822191"/>
+            <a:ext cx="6400800" cy="585215"/>
           </a:xfrm>
           <a:prstGeom prst="rect">
             <a:avLst/>
@@ -3549,13 +3549,13 @@
           <a:noFill/>
         </p:spPr>
         <p:txBody>
-          <a:bodyPr wrap="square">
+          <a:bodyPr wrap="square" tIns="25400" bIns="0" lIns="0">
             <a:spAutoFit/>
           </a:bodyPr>
           <a:lstStyle/>
           <a:p>
             <a:pPr>
-              <a:defRPr sz="1000">
+              <a:defRPr sz="800">
                 <a:solidFill>
                   <a:srgbClr val="CCCCCC"/>
                 </a:solidFill>
@@ -3563,7 +3563,7 @@
               </a:defRPr>
             </a:pPr>
             <a:r>
-              <a:t>You can use this method for server-side encryption at rest. This solution does not meet the requirement for client-side </a:t>
+              <a:t>You can use this method for server-side encryption at rest. This solution does not meet the requirem</a:t>
             </a:r>
           </a:p>
         </p:txBody>
@@ -3576,8 +3576,8 @@
         </p:nvSpPr>
         <p:spPr>
           <a:xfrm>
-            <a:off x="365760" y="4206240"/>
-            <a:ext cx="274320" cy="274320"/>
+            <a:off x="274320" y="4471416"/>
+            <a:ext cx="201168" cy="201168"/>
           </a:xfrm>
           <a:prstGeom prst="ellipse">
             <a:avLst/>
@@ -3608,7 +3608,7 @@
           <a:lstStyle/>
           <a:p>
             <a:pPr algn="ctr">
-              <a:defRPr sz="900" b="1">
+              <a:defRPr sz="700" b="1">
                 <a:solidFill>
                   <a:srgbClr val="FFFFFF"/>
                 </a:solidFill>
@@ -3628,8 +3628,8 @@
         </p:nvSpPr>
         <p:spPr>
           <a:xfrm>
-            <a:off x="777240" y="4206240"/>
-            <a:ext cx="5943600" cy="411480"/>
+            <a:off x="548640" y="4425696"/>
+            <a:ext cx="6400800" cy="585215"/>
           </a:xfrm>
           <a:prstGeom prst="rect">
             <a:avLst/>
@@ -3637,13 +3637,13 @@
           <a:noFill/>
         </p:spPr>
         <p:txBody>
-          <a:bodyPr wrap="square">
+          <a:bodyPr wrap="square" tIns="25400" bIns="0" lIns="0">
             <a:spAutoFit/>
           </a:bodyPr>
           <a:lstStyle/>
           <a:p>
             <a:pPr>
-              <a:defRPr sz="1000">
+              <a:defRPr sz="800">
                 <a:solidFill>
                   <a:srgbClr val="CCCCCC"/>
                 </a:solidFill>
@@ -3651,7 +3651,7 @@
               </a:defRPr>
             </a:pPr>
             <a:r>
-              <a:t>You can use this method for server-side encryption at rest. This solution does not meet the requirement for client-side </a:t>
+              <a:t>You can use this method for server-side encryption at rest. This solution does not meet the requirem</a:t>
             </a:r>
           </a:p>
         </p:txBody>
@@ -3933,8 +3933,8 @@
         </p:blipFill>
         <p:spPr>
           <a:xfrm>
-            <a:off x="182880" y="914400"/>
-            <a:ext cx="5280660" cy="3840480"/>
+            <a:off x="182880" y="914759"/>
+            <a:ext cx="5303520" cy="3839760"/>
           </a:xfrm>
           <a:prstGeom prst="rect">
             <a:avLst/>
@@ -4069,9 +4069,9 @@
           <a:p>
             <a:pPr>
               <a:spcAft>
-                <a:spcPts val="600"/>
+                <a:spcPts val="400"/>
               </a:spcAft>
-              <a:defRPr sz="900">
+              <a:defRPr sz="800">
                 <a:solidFill>
                   <a:srgbClr val="212121"/>
                 </a:solidFill>
@@ -4079,15 +4079,15 @@
               </a:defRPr>
             </a:pPr>
             <a:r>
-              <a:t>• When you configure the DynamoDB Encryption Client to use AWS KMS, the DynamoDB Encryption Client uses a KMS key that is always encrypted when the key is used outside of AWS KMS.</a:t>
+              <a:t>• When you configure the DynamoDB Encryption Client to use AWS KMS</a:t>
             </a:r>
           </a:p>
           <a:p>
             <a:pPr>
               <a:spcAft>
-                <a:spcPts val="600"/>
+                <a:spcPts val="400"/>
               </a:spcAft>
-              <a:defRPr sz="900">
+              <a:defRPr sz="800">
                 <a:solidFill>
                   <a:srgbClr val="212121"/>
                 </a:solidFill>
@@ -4095,15 +4095,15 @@
               </a:defRPr>
             </a:pPr>
             <a:r>
-              <a:t>• This cryptographic materials provider returns a unique encryption key and a signing key for every table item.</a:t>
+              <a:t>• The DynamoDB Encryption Client uses a KMS key that is always encrypted when the key is used outside of AWS KMS</a:t>
             </a:r>
           </a:p>
           <a:p>
             <a:pPr>
               <a:spcAft>
-                <a:spcPts val="600"/>
+                <a:spcPts val="400"/>
               </a:spcAft>
-              <a:defRPr sz="900">
+              <a:defRPr sz="800">
                 <a:solidFill>
                   <a:srgbClr val="212121"/>
                 </a:solidFill>
@@ -4111,7 +4111,23 @@
               </a:defRPr>
             </a:pPr>
             <a:r>
-              <a:t>• This method of encryption uses a symmetric KMS key.</a:t>
+              <a:t>• This cryptographic materials provider returns a unique encryption key and a signing key for every table item</a:t>
+            </a:r>
+          </a:p>
+          <a:p>
+            <a:pPr>
+              <a:spcAft>
+                <a:spcPts val="400"/>
+              </a:spcAft>
+              <a:defRPr sz="800">
+                <a:solidFill>
+                  <a:srgbClr val="212121"/>
+                </a:solidFill>
+                <a:latin typeface="Segoe UI"/>
+              </a:defRPr>
+            </a:pPr>
+            <a:r>
+              <a:t>• This method of encryption uses a symmetric KMS key</a:t>
             </a:r>
           </a:p>
         </p:txBody>
@@ -4291,7 +4307,7 @@
         <p:spPr>
           <a:xfrm>
             <a:off x="182880" y="914400"/>
-            <a:ext cx="5280660" cy="3840480"/>
+            <a:ext cx="4018188" cy="3840480"/>
           </a:xfrm>
           <a:prstGeom prst="rect">
             <a:avLst/>
@@ -4426,9 +4442,9 @@
           <a:p>
             <a:pPr>
               <a:spcAft>
-                <a:spcPts val="600"/>
+                <a:spcPts val="400"/>
               </a:spcAft>
-              <a:defRPr sz="900">
+              <a:defRPr sz="800">
                 <a:solidFill>
                   <a:srgbClr val="212121"/>
                 </a:solidFill>
@@ -4436,15 +4452,15 @@
               </a:defRPr>
             </a:pPr>
             <a:r>
-              <a:t>• When you configure the DynamoDB Encryption Client to use AWS KMS, the DynamoDB Encryption Client uses a KMS key that is always encrypted when the key is used outside of AWS KMS.</a:t>
+              <a:t>• When you configure the DynamoDB Encryption Client to use AWS KMS</a:t>
             </a:r>
           </a:p>
           <a:p>
             <a:pPr>
               <a:spcAft>
-                <a:spcPts val="600"/>
+                <a:spcPts val="400"/>
               </a:spcAft>
-              <a:defRPr sz="900">
+              <a:defRPr sz="800">
                 <a:solidFill>
                   <a:srgbClr val="212121"/>
                 </a:solidFill>
@@ -4452,15 +4468,15 @@
               </a:defRPr>
             </a:pPr>
             <a:r>
-              <a:t>• This cryptographic materials provider returns a unique encryption key and a signing key for every table item.</a:t>
+              <a:t>• The DynamoDB Encryption Client uses a KMS key that is always encrypted when the key is used outside of AWS KMS</a:t>
             </a:r>
           </a:p>
           <a:p>
             <a:pPr>
               <a:spcAft>
-                <a:spcPts val="600"/>
+                <a:spcPts val="400"/>
               </a:spcAft>
-              <a:defRPr sz="900">
+              <a:defRPr sz="800">
                 <a:solidFill>
                   <a:srgbClr val="212121"/>
                 </a:solidFill>
@@ -4468,7 +4484,23 @@
               </a:defRPr>
             </a:pPr>
             <a:r>
-              <a:t>• This method of encryption would require a symmetric KMS key, not an asymmetric key.</a:t>
+              <a:t>• This cryptographic materials provider returns a unique encryption key and a signing key for every table item</a:t>
+            </a:r>
+          </a:p>
+          <a:p>
+            <a:pPr>
+              <a:spcAft>
+                <a:spcPts val="400"/>
+              </a:spcAft>
+              <a:defRPr sz="800">
+                <a:solidFill>
+                  <a:srgbClr val="212121"/>
+                </a:solidFill>
+                <a:latin typeface="Segoe UI"/>
+              </a:defRPr>
+            </a:pPr>
+            <a:r>
+              <a:t>• This method of encryption would require a symmetric KMS key, not an asymmetric key</a:t>
             </a:r>
           </a:p>
         </p:txBody>
@@ -4647,8 +4679,8 @@
         </p:blipFill>
         <p:spPr>
           <a:xfrm>
-            <a:off x="182880" y="914400"/>
-            <a:ext cx="3115683" cy="3840480"/>
+            <a:off x="182880" y="1936197"/>
+            <a:ext cx="5303520" cy="1796885"/>
           </a:xfrm>
           <a:prstGeom prst="rect">
             <a:avLst/>
@@ -4783,9 +4815,9 @@
           <a:p>
             <a:pPr>
               <a:spcAft>
-                <a:spcPts val="600"/>
+                <a:spcPts val="400"/>
               </a:spcAft>
-              <a:defRPr sz="900">
+              <a:defRPr sz="800">
                 <a:solidFill>
                   <a:srgbClr val="212121"/>
                 </a:solidFill>
@@ -4793,15 +4825,15 @@
               </a:defRPr>
             </a:pPr>
             <a:r>
-              <a:t>• The DynamoDB Encryption Client provides end-to-end protection for your data in transit and at rest.</a:t>
+              <a:t>• The DynamoDB Encryption Client provides end-to-end protection for your data in transit and at rest</a:t>
             </a:r>
           </a:p>
           <a:p>
             <a:pPr>
               <a:spcAft>
-                <a:spcPts val="600"/>
+                <a:spcPts val="400"/>
               </a:spcAft>
-              <a:defRPr sz="900">
+              <a:defRPr sz="800">
                 <a:solidFill>
                   <a:srgbClr val="212121"/>
                 </a:solidFill>
@@ -4809,7 +4841,7 @@
               </a:defRPr>
             </a:pPr>
             <a:r>
-              <a:t>• You can encrypt selected items or attribute values in a table.</a:t>
+              <a:t>• You can encrypt selected items or attribute values in a table</a:t>
             </a:r>
           </a:p>
         </p:txBody>
@@ -4989,7 +5021,7 @@
         <p:spPr>
           <a:xfrm>
             <a:off x="182880" y="914400"/>
-            <a:ext cx="5280660" cy="3840480"/>
+            <a:ext cx="3837217" cy="3840480"/>
           </a:xfrm>
           <a:prstGeom prst="rect">
             <a:avLst/>
@@ -5124,9 +5156,9 @@
           <a:p>
             <a:pPr>
               <a:spcAft>
-                <a:spcPts val="600"/>
+                <a:spcPts val="400"/>
               </a:spcAft>
-              <a:defRPr sz="900">
+              <a:defRPr sz="800">
                 <a:solidFill>
                   <a:srgbClr val="212121"/>
                 </a:solidFill>
@@ -5134,15 +5166,15 @@
               </a:defRPr>
             </a:pPr>
             <a:r>
-              <a:t>• You can use this method for server-side encryption at rest.</a:t>
+              <a:t>• You can use this method for server-side encryption at rest</a:t>
             </a:r>
           </a:p>
           <a:p>
             <a:pPr>
               <a:spcAft>
-                <a:spcPts val="600"/>
+                <a:spcPts val="400"/>
               </a:spcAft>
-              <a:defRPr sz="900">
+              <a:defRPr sz="800">
                 <a:solidFill>
                   <a:srgbClr val="212121"/>
                 </a:solidFill>
@@ -5150,7 +5182,7 @@
               </a:defRPr>
             </a:pPr>
             <a:r>
-              <a:t>• This solution does not meet the requirement for client-side encryption.</a:t>
+              <a:t>• This solution does not meet the requirement for client-side encryption</a:t>
             </a:r>
           </a:p>
         </p:txBody>
@@ -5329,8 +5361,8 @@
         </p:blipFill>
         <p:spPr>
           <a:xfrm>
-            <a:off x="182880" y="914400"/>
-            <a:ext cx="5280660" cy="3840480"/>
+            <a:off x="182880" y="1147156"/>
+            <a:ext cx="5303520" cy="3374967"/>
           </a:xfrm>
           <a:prstGeom prst="rect">
             <a:avLst/>
@@ -5465,9 +5497,9 @@
           <a:p>
             <a:pPr>
               <a:spcAft>
-                <a:spcPts val="600"/>
+                <a:spcPts val="400"/>
               </a:spcAft>
-              <a:defRPr sz="900">
+              <a:defRPr sz="800">
                 <a:solidFill>
                   <a:srgbClr val="212121"/>
                 </a:solidFill>
@@ -5475,15 +5507,15 @@
               </a:defRPr>
             </a:pPr>
             <a:r>
-              <a:t>• You can use this method for server-side encryption at rest.</a:t>
+              <a:t>• You can use this method for server-side encryption at rest</a:t>
             </a:r>
           </a:p>
           <a:p>
             <a:pPr>
               <a:spcAft>
-                <a:spcPts val="600"/>
+                <a:spcPts val="400"/>
               </a:spcAft>
-              <a:defRPr sz="900">
+              <a:defRPr sz="800">
                 <a:solidFill>
                   <a:srgbClr val="212121"/>
                 </a:solidFill>
@@ -5491,7 +5523,7 @@
               </a:defRPr>
             </a:pPr>
             <a:r>
-              <a:t>• This solution does not meet the requirement for client-side encryption.</a:t>
+              <a:t>• This solution does not meet the requirement for client-side encryption</a:t>
             </a:r>
           </a:p>
         </p:txBody>

--- a/session3/exam-strategy/q2/q2_exam_strategy.pptx
+++ b/session3/exam-strategy/q2/q2_exam_strategy.pptx
@@ -3188,8 +3188,8 @@
         </p:nvSpPr>
         <p:spPr>
           <a:xfrm>
-            <a:off x="274320" y="640080"/>
-            <a:ext cx="6583680" cy="1280160"/>
+            <a:off x="274320" y="685800"/>
+            <a:ext cx="6400800" cy="1645920"/>
           </a:xfrm>
           <a:prstGeom prst="rect">
             <a:avLst/>
@@ -3197,13 +3197,13 @@
           <a:noFill/>
         </p:spPr>
         <p:txBody>
-          <a:bodyPr wrap="square" tIns="0" bIns="0">
+          <a:bodyPr wrap="square">
             <a:spAutoFit/>
           </a:bodyPr>
           <a:lstStyle/>
           <a:p>
             <a:pPr>
-              <a:defRPr sz="900">
+              <a:defRPr sz="1100">
                 <a:solidFill>
                   <a:srgbClr val="FFFFFF"/>
                 </a:solidFill>
@@ -3224,8 +3224,8 @@
         </p:nvSpPr>
         <p:spPr>
           <a:xfrm>
-            <a:off x="274320" y="2057400"/>
-            <a:ext cx="201168" cy="201168"/>
+            <a:off x="365760" y="2377440"/>
+            <a:ext cx="274320" cy="274320"/>
           </a:xfrm>
           <a:prstGeom prst="ellipse">
             <a:avLst/>
@@ -3256,7 +3256,7 @@
           <a:lstStyle/>
           <a:p>
             <a:pPr algn="ctr">
-              <a:defRPr sz="700" b="1">
+              <a:defRPr sz="900" b="1">
                 <a:solidFill>
                   <a:srgbClr val="FFFFFF"/>
                 </a:solidFill>
@@ -3276,8 +3276,8 @@
         </p:nvSpPr>
         <p:spPr>
           <a:xfrm>
-            <a:off x="548640" y="2011680"/>
-            <a:ext cx="6400800" cy="585215"/>
+            <a:off x="777240" y="2377440"/>
+            <a:ext cx="5943600" cy="411480"/>
           </a:xfrm>
           <a:prstGeom prst="rect">
             <a:avLst/>
@@ -3285,13 +3285,13 @@
           <a:noFill/>
         </p:spPr>
         <p:txBody>
-          <a:bodyPr wrap="square" tIns="25400" bIns="0" lIns="0">
+          <a:bodyPr wrap="square">
             <a:spAutoFit/>
           </a:bodyPr>
           <a:lstStyle/>
           <a:p>
             <a:pPr>
-              <a:defRPr sz="800">
+              <a:defRPr sz="1000">
                 <a:solidFill>
                   <a:srgbClr val="CCCCCC"/>
                 </a:solidFill>
@@ -3299,7 +3299,7 @@
               </a:defRPr>
             </a:pPr>
             <a:r>
-              <a:t>When you configure the DynamoDB Encryption Client to use AWS KMS, the DynamoDB Encryption Client use</a:t>
+              <a:t>When you configure the DynamoDB Encryption Client to use AWS KMS, the DynamoDB Encryption Client uses a KMS key that is </a:t>
             </a:r>
           </a:p>
         </p:txBody>
@@ -3312,8 +3312,8 @@
         </p:nvSpPr>
         <p:spPr>
           <a:xfrm>
-            <a:off x="274320" y="2660904"/>
-            <a:ext cx="201168" cy="201168"/>
+            <a:off x="365760" y="2834640"/>
+            <a:ext cx="274320" cy="274320"/>
           </a:xfrm>
           <a:prstGeom prst="ellipse">
             <a:avLst/>
@@ -3344,7 +3344,7 @@
           <a:lstStyle/>
           <a:p>
             <a:pPr algn="ctr">
-              <a:defRPr sz="700" b="1">
+              <a:defRPr sz="900" b="1">
                 <a:solidFill>
                   <a:srgbClr val="FFFFFF"/>
                 </a:solidFill>
@@ -3364,8 +3364,8 @@
         </p:nvSpPr>
         <p:spPr>
           <a:xfrm>
-            <a:off x="548640" y="2615184"/>
-            <a:ext cx="6400800" cy="585215"/>
+            <a:off x="777240" y="2834640"/>
+            <a:ext cx="5943600" cy="411480"/>
           </a:xfrm>
           <a:prstGeom prst="rect">
             <a:avLst/>
@@ -3373,13 +3373,13 @@
           <a:noFill/>
         </p:spPr>
         <p:txBody>
-          <a:bodyPr wrap="square" tIns="25400" bIns="0" lIns="0">
+          <a:bodyPr wrap="square">
             <a:spAutoFit/>
           </a:bodyPr>
           <a:lstStyle/>
           <a:p>
             <a:pPr>
-              <a:defRPr sz="800">
+              <a:defRPr sz="1000">
                 <a:solidFill>
                   <a:srgbClr val="CCCCCC"/>
                 </a:solidFill>
@@ -3387,7 +3387,7 @@
               </a:defRPr>
             </a:pPr>
             <a:r>
-              <a:t>When you configure the DynamoDB Encryption Client to use AWS KMS, the DynamoDB Encryption Client use</a:t>
+              <a:t>When you configure the DynamoDB Encryption Client to use AWS KMS, the DynamoDB Encryption Client uses a KMS key that is </a:t>
             </a:r>
           </a:p>
         </p:txBody>
@@ -3400,8 +3400,8 @@
         </p:nvSpPr>
         <p:spPr>
           <a:xfrm>
-            <a:off x="274320" y="3264408"/>
-            <a:ext cx="201168" cy="201168"/>
+            <a:off x="365760" y="3291840"/>
+            <a:ext cx="274320" cy="274320"/>
           </a:xfrm>
           <a:prstGeom prst="ellipse">
             <a:avLst/>
@@ -3432,7 +3432,7 @@
           <a:lstStyle/>
           <a:p>
             <a:pPr algn="ctr">
-              <a:defRPr sz="700" b="1">
+              <a:defRPr sz="900" b="1">
                 <a:solidFill>
                   <a:srgbClr val="FFFFFF"/>
                 </a:solidFill>
@@ -3452,8 +3452,8 @@
         </p:nvSpPr>
         <p:spPr>
           <a:xfrm>
-            <a:off x="548640" y="3218688"/>
-            <a:ext cx="6400800" cy="585215"/>
+            <a:off x="777240" y="3291840"/>
+            <a:ext cx="5943600" cy="411480"/>
           </a:xfrm>
           <a:prstGeom prst="rect">
             <a:avLst/>
@@ -3461,13 +3461,13 @@
           <a:noFill/>
         </p:spPr>
         <p:txBody>
-          <a:bodyPr wrap="square" tIns="25400" bIns="0" lIns="0">
+          <a:bodyPr wrap="square">
             <a:spAutoFit/>
           </a:bodyPr>
           <a:lstStyle/>
           <a:p>
             <a:pPr>
-              <a:defRPr sz="800">
+              <a:defRPr sz="1000">
                 <a:solidFill>
                   <a:srgbClr val="CCCCCC"/>
                 </a:solidFill>
@@ -3475,7 +3475,7 @@
               </a:defRPr>
             </a:pPr>
             <a:r>
-              <a:t>The DynamoDB Encryption Client provides end-to-end protection for your data in transit and at rest. </a:t>
+              <a:t>The DynamoDB Encryption Client provides end-to-end protection for your data in transit and at rest. You can encrypt sele</a:t>
             </a:r>
           </a:p>
         </p:txBody>
@@ -3488,8 +3488,8 @@
         </p:nvSpPr>
         <p:spPr>
           <a:xfrm>
-            <a:off x="274320" y="3867911"/>
-            <a:ext cx="201168" cy="201168"/>
+            <a:off x="365760" y="3749039"/>
+            <a:ext cx="274320" cy="274320"/>
           </a:xfrm>
           <a:prstGeom prst="ellipse">
             <a:avLst/>
@@ -3520,7 +3520,7 @@
           <a:lstStyle/>
           <a:p>
             <a:pPr algn="ctr">
-              <a:defRPr sz="700" b="1">
+              <a:defRPr sz="900" b="1">
                 <a:solidFill>
                   <a:srgbClr val="FFFFFF"/>
                 </a:solidFill>
@@ -3540,8 +3540,8 @@
         </p:nvSpPr>
         <p:spPr>
           <a:xfrm>
-            <a:off x="548640" y="3822191"/>
-            <a:ext cx="6400800" cy="585215"/>
+            <a:off x="777240" y="3749039"/>
+            <a:ext cx="5943600" cy="411480"/>
           </a:xfrm>
           <a:prstGeom prst="rect">
             <a:avLst/>
@@ -3549,13 +3549,13 @@
           <a:noFill/>
         </p:spPr>
         <p:txBody>
-          <a:bodyPr wrap="square" tIns="25400" bIns="0" lIns="0">
+          <a:bodyPr wrap="square">
             <a:spAutoFit/>
           </a:bodyPr>
           <a:lstStyle/>
           <a:p>
             <a:pPr>
-              <a:defRPr sz="800">
+              <a:defRPr sz="1000">
                 <a:solidFill>
                   <a:srgbClr val="CCCCCC"/>
                 </a:solidFill>
@@ -3563,7 +3563,7 @@
               </a:defRPr>
             </a:pPr>
             <a:r>
-              <a:t>You can use this method for server-side encryption at rest. This solution does not meet the requirem</a:t>
+              <a:t>You can use this method for server-side encryption at rest. This solution does not meet the requirement for client-side </a:t>
             </a:r>
           </a:p>
         </p:txBody>
@@ -3576,8 +3576,8 @@
         </p:nvSpPr>
         <p:spPr>
           <a:xfrm>
-            <a:off x="274320" y="4471416"/>
-            <a:ext cx="201168" cy="201168"/>
+            <a:off x="365760" y="4206240"/>
+            <a:ext cx="274320" cy="274320"/>
           </a:xfrm>
           <a:prstGeom prst="ellipse">
             <a:avLst/>
@@ -3608,7 +3608,7 @@
           <a:lstStyle/>
           <a:p>
             <a:pPr algn="ctr">
-              <a:defRPr sz="700" b="1">
+              <a:defRPr sz="900" b="1">
                 <a:solidFill>
                   <a:srgbClr val="FFFFFF"/>
                 </a:solidFill>
@@ -3628,8 +3628,8 @@
         </p:nvSpPr>
         <p:spPr>
           <a:xfrm>
-            <a:off x="548640" y="4425696"/>
-            <a:ext cx="6400800" cy="585215"/>
+            <a:off x="777240" y="4206240"/>
+            <a:ext cx="5943600" cy="411480"/>
           </a:xfrm>
           <a:prstGeom prst="rect">
             <a:avLst/>
@@ -3637,13 +3637,13 @@
           <a:noFill/>
         </p:spPr>
         <p:txBody>
-          <a:bodyPr wrap="square" tIns="25400" bIns="0" lIns="0">
+          <a:bodyPr wrap="square">
             <a:spAutoFit/>
           </a:bodyPr>
           <a:lstStyle/>
           <a:p>
             <a:pPr>
-              <a:defRPr sz="800">
+              <a:defRPr sz="1000">
                 <a:solidFill>
                   <a:srgbClr val="CCCCCC"/>
                 </a:solidFill>
@@ -3651,7 +3651,7 @@
               </a:defRPr>
             </a:pPr>
             <a:r>
-              <a:t>You can use this method for server-side encryption at rest. This solution does not meet the requirem</a:t>
+              <a:t>You can use this method for server-side encryption at rest. This solution does not meet the requirement for client-side </a:t>
             </a:r>
           </a:p>
         </p:txBody>
@@ -3933,8 +3933,8 @@
         </p:blipFill>
         <p:spPr>
           <a:xfrm>
-            <a:off x="182880" y="914759"/>
-            <a:ext cx="5303520" cy="3839760"/>
+            <a:off x="182880" y="1221551"/>
+            <a:ext cx="5303520" cy="3226176"/>
           </a:xfrm>
           <a:prstGeom prst="rect">
             <a:avLst/>
@@ -4069,9 +4069,9 @@
           <a:p>
             <a:pPr>
               <a:spcAft>
-                <a:spcPts val="400"/>
+                <a:spcPts val="600"/>
               </a:spcAft>
-              <a:defRPr sz="800">
+              <a:defRPr sz="900">
                 <a:solidFill>
                   <a:srgbClr val="212121"/>
                 </a:solidFill>
@@ -4079,15 +4079,15 @@
               </a:defRPr>
             </a:pPr>
             <a:r>
-              <a:t>• When you configure the DynamoDB Encryption Client to use AWS KMS</a:t>
+              <a:t>• When you configure the DynamoDB Encryption Client to use AWS KMS, the DynamoDB Encryption Client uses a KMS key that is always encrypted when the key is used outside of AWS KMS.</a:t>
             </a:r>
           </a:p>
           <a:p>
             <a:pPr>
               <a:spcAft>
-                <a:spcPts val="400"/>
+                <a:spcPts val="600"/>
               </a:spcAft>
-              <a:defRPr sz="800">
+              <a:defRPr sz="900">
                 <a:solidFill>
                   <a:srgbClr val="212121"/>
                 </a:solidFill>
@@ -4095,15 +4095,15 @@
               </a:defRPr>
             </a:pPr>
             <a:r>
-              <a:t>• The DynamoDB Encryption Client uses a KMS key that is always encrypted when the key is used outside of AWS KMS</a:t>
+              <a:t>• This cryptographic materials provider returns a unique encryption key and a signing key for every table item.</a:t>
             </a:r>
           </a:p>
           <a:p>
             <a:pPr>
               <a:spcAft>
-                <a:spcPts val="400"/>
+                <a:spcPts val="600"/>
               </a:spcAft>
-              <a:defRPr sz="800">
+              <a:defRPr sz="900">
                 <a:solidFill>
                   <a:srgbClr val="212121"/>
                 </a:solidFill>
@@ -4111,23 +4111,7 @@
               </a:defRPr>
             </a:pPr>
             <a:r>
-              <a:t>• This cryptographic materials provider returns a unique encryption key and a signing key for every table item</a:t>
-            </a:r>
-          </a:p>
-          <a:p>
-            <a:pPr>
-              <a:spcAft>
-                <a:spcPts val="400"/>
-              </a:spcAft>
-              <a:defRPr sz="800">
-                <a:solidFill>
-                  <a:srgbClr val="212121"/>
-                </a:solidFill>
-                <a:latin typeface="Segoe UI"/>
-              </a:defRPr>
-            </a:pPr>
-            <a:r>
-              <a:t>• This method of encryption uses a symmetric KMS key</a:t>
+              <a:t>• This method of encryption uses a symmetric KMS key.</a:t>
             </a:r>
           </a:p>
         </p:txBody>
@@ -4306,8 +4290,8 @@
         </p:blipFill>
         <p:spPr>
           <a:xfrm>
-            <a:off x="182880" y="914400"/>
-            <a:ext cx="4018188" cy="3840480"/>
+            <a:off x="182880" y="1582491"/>
+            <a:ext cx="5303520" cy="2504296"/>
           </a:xfrm>
           <a:prstGeom prst="rect">
             <a:avLst/>
@@ -4442,9 +4426,9 @@
           <a:p>
             <a:pPr>
               <a:spcAft>
-                <a:spcPts val="400"/>
+                <a:spcPts val="600"/>
               </a:spcAft>
-              <a:defRPr sz="800">
+              <a:defRPr sz="900">
                 <a:solidFill>
                   <a:srgbClr val="212121"/>
                 </a:solidFill>
@@ -4452,15 +4436,15 @@
               </a:defRPr>
             </a:pPr>
             <a:r>
-              <a:t>• When you configure the DynamoDB Encryption Client to use AWS KMS</a:t>
+              <a:t>• When you configure the DynamoDB Encryption Client to use AWS KMS, the DynamoDB Encryption Client uses a KMS key that is always encrypted when the key is used outside of AWS KMS.</a:t>
             </a:r>
           </a:p>
           <a:p>
             <a:pPr>
               <a:spcAft>
-                <a:spcPts val="400"/>
+                <a:spcPts val="600"/>
               </a:spcAft>
-              <a:defRPr sz="800">
+              <a:defRPr sz="900">
                 <a:solidFill>
                   <a:srgbClr val="212121"/>
                 </a:solidFill>
@@ -4468,15 +4452,15 @@
               </a:defRPr>
             </a:pPr>
             <a:r>
-              <a:t>• The DynamoDB Encryption Client uses a KMS key that is always encrypted when the key is used outside of AWS KMS</a:t>
+              <a:t>• This cryptographic materials provider returns a unique encryption key and a signing key for every table item.</a:t>
             </a:r>
           </a:p>
           <a:p>
             <a:pPr>
               <a:spcAft>
-                <a:spcPts val="400"/>
+                <a:spcPts val="600"/>
               </a:spcAft>
-              <a:defRPr sz="800">
+              <a:defRPr sz="900">
                 <a:solidFill>
                   <a:srgbClr val="212121"/>
                 </a:solidFill>
@@ -4484,23 +4468,7 @@
               </a:defRPr>
             </a:pPr>
             <a:r>
-              <a:t>• This cryptographic materials provider returns a unique encryption key and a signing key for every table item</a:t>
-            </a:r>
-          </a:p>
-          <a:p>
-            <a:pPr>
-              <a:spcAft>
-                <a:spcPts val="400"/>
-              </a:spcAft>
-              <a:defRPr sz="800">
-                <a:solidFill>
-                  <a:srgbClr val="212121"/>
-                </a:solidFill>
-                <a:latin typeface="Segoe UI"/>
-              </a:defRPr>
-            </a:pPr>
-            <a:r>
-              <a:t>• This method of encryption would require a symmetric KMS key, not an asymmetric key</a:t>
+              <a:t>• This method of encryption would require a symmetric KMS key, not an asymmetric key.</a:t>
             </a:r>
           </a:p>
         </p:txBody>
@@ -4679,8 +4647,8 @@
         </p:blipFill>
         <p:spPr>
           <a:xfrm>
-            <a:off x="182880" y="1936197"/>
-            <a:ext cx="5303520" cy="1796885"/>
+            <a:off x="182880" y="1691455"/>
+            <a:ext cx="5303520" cy="2286368"/>
           </a:xfrm>
           <a:prstGeom prst="rect">
             <a:avLst/>
@@ -4815,9 +4783,9 @@
           <a:p>
             <a:pPr>
               <a:spcAft>
-                <a:spcPts val="400"/>
+                <a:spcPts val="600"/>
               </a:spcAft>
-              <a:defRPr sz="800">
+              <a:defRPr sz="900">
                 <a:solidFill>
                   <a:srgbClr val="212121"/>
                 </a:solidFill>
@@ -4825,15 +4793,15 @@
               </a:defRPr>
             </a:pPr>
             <a:r>
-              <a:t>• The DynamoDB Encryption Client provides end-to-end protection for your data in transit and at rest</a:t>
+              <a:t>• The DynamoDB Encryption Client provides end-to-end protection for your data in transit and at rest.</a:t>
             </a:r>
           </a:p>
           <a:p>
             <a:pPr>
               <a:spcAft>
-                <a:spcPts val="400"/>
+                <a:spcPts val="600"/>
               </a:spcAft>
-              <a:defRPr sz="800">
+              <a:defRPr sz="900">
                 <a:solidFill>
                   <a:srgbClr val="212121"/>
                 </a:solidFill>
@@ -4841,7 +4809,7 @@
               </a:defRPr>
             </a:pPr>
             <a:r>
-              <a:t>• You can encrypt selected items or attribute values in a table</a:t>
+              <a:t>• You can encrypt selected items or attribute values in a table.</a:t>
             </a:r>
           </a:p>
         </p:txBody>
@@ -5020,8 +4988,8 @@
         </p:blipFill>
         <p:spPr>
           <a:xfrm>
-            <a:off x="182880" y="914400"/>
-            <a:ext cx="3837217" cy="3840480"/>
+            <a:off x="182880" y="1721498"/>
+            <a:ext cx="5303520" cy="2226282"/>
           </a:xfrm>
           <a:prstGeom prst="rect">
             <a:avLst/>
@@ -5156,9 +5124,9 @@
           <a:p>
             <a:pPr>
               <a:spcAft>
-                <a:spcPts val="400"/>
+                <a:spcPts val="600"/>
               </a:spcAft>
-              <a:defRPr sz="800">
+              <a:defRPr sz="900">
                 <a:solidFill>
                   <a:srgbClr val="212121"/>
                 </a:solidFill>
@@ -5166,15 +5134,15 @@
               </a:defRPr>
             </a:pPr>
             <a:r>
-              <a:t>• You can use this method for server-side encryption at rest</a:t>
+              <a:t>• You can use this method for server-side encryption at rest.</a:t>
             </a:r>
           </a:p>
           <a:p>
             <a:pPr>
               <a:spcAft>
-                <a:spcPts val="400"/>
+                <a:spcPts val="600"/>
               </a:spcAft>
-              <a:defRPr sz="800">
+              <a:defRPr sz="900">
                 <a:solidFill>
                   <a:srgbClr val="212121"/>
                 </a:solidFill>
@@ -5182,7 +5150,7 @@
               </a:defRPr>
             </a:pPr>
             <a:r>
-              <a:t>• This solution does not meet the requirement for client-side encryption</a:t>
+              <a:t>• This solution does not meet the requirement for client-side encryption.</a:t>
             </a:r>
           </a:p>
         </p:txBody>
@@ -5361,8 +5329,8 @@
         </p:blipFill>
         <p:spPr>
           <a:xfrm>
-            <a:off x="182880" y="1147156"/>
-            <a:ext cx="5303520" cy="3374967"/>
+            <a:off x="182880" y="1882562"/>
+            <a:ext cx="5303520" cy="1904155"/>
           </a:xfrm>
           <a:prstGeom prst="rect">
             <a:avLst/>
@@ -5497,9 +5465,9 @@
           <a:p>
             <a:pPr>
               <a:spcAft>
-                <a:spcPts val="400"/>
+                <a:spcPts val="600"/>
               </a:spcAft>
-              <a:defRPr sz="800">
+              <a:defRPr sz="900">
                 <a:solidFill>
                   <a:srgbClr val="212121"/>
                 </a:solidFill>
@@ -5507,15 +5475,15 @@
               </a:defRPr>
             </a:pPr>
             <a:r>
-              <a:t>• You can use this method for server-side encryption at rest</a:t>
+              <a:t>• You can use this method for server-side encryption at rest.</a:t>
             </a:r>
           </a:p>
           <a:p>
             <a:pPr>
               <a:spcAft>
-                <a:spcPts val="400"/>
+                <a:spcPts val="600"/>
               </a:spcAft>
-              <a:defRPr sz="800">
+              <a:defRPr sz="900">
                 <a:solidFill>
                   <a:srgbClr val="212121"/>
                 </a:solidFill>
@@ -5523,7 +5491,7 @@
               </a:defRPr>
             </a:pPr>
             <a:r>
-              <a:t>• This solution does not meet the requirement for client-side encryption</a:t>
+              <a:t>• This solution does not meet the requirement for client-side encryption.</a:t>
             </a:r>
           </a:p>
         </p:txBody>
